--- a/atelier/atelier-f05-studio-numbers.pptx
+++ b/atelier/atelier-f05-studio-numbers.pptx
@@ -3360,7 +3360,7 @@
         </p:nvSpPr>
         <p:spPr>
           <a:xfrm>
-            <a:off x="3644801" y="5013871"/>
+            <a:off x="3644801" y="5004346"/>
             <a:ext cx="9525" cy="1114425"/>
           </a:xfrm>
           <a:prstGeom prst="rect">
@@ -3404,7 +3404,7 @@
         </p:nvSpPr>
         <p:spPr>
           <a:xfrm>
-            <a:off x="6632525" y="5013871"/>
+            <a:off x="6632525" y="5004346"/>
             <a:ext cx="9525" cy="1114425"/>
           </a:xfrm>
           <a:prstGeom prst="rect">
@@ -3684,7 +3684,7 @@
         </p:nvSpPr>
         <p:spPr>
           <a:xfrm>
-            <a:off x="666750" y="3566071"/>
+            <a:off x="666750" y="3575596"/>
             <a:ext cx="14706600" cy="133350"/>
           </a:xfrm>
           <a:prstGeom prst="rect">
@@ -3719,7 +3719,7 @@
         </p:nvSpPr>
         <p:spPr>
           <a:xfrm>
-            <a:off x="666750" y="3851821"/>
+            <a:off x="666750" y="3861346"/>
             <a:ext cx="5258276" cy="762000"/>
           </a:xfrm>
           <a:prstGeom prst="rect">
@@ -3731,7 +3731,11 @@
           <a:bodyPr wrap="none" anchor="t" lIns="0" rIns="0" tIns="0" bIns="0"/>
           <a:lstStyle/>
           <a:p>
-            <a:pPr algn="l"/>
+            <a:pPr algn="l">
+              <a:lnSpc>
+                <a:spcPct val="92000"/>
+              </a:lnSpc>
+            </a:pPr>
             <a:r>
               <a:rPr sz="5400" i="1" b="0">
                 <a:solidFill>
@@ -3754,7 +3758,7 @@
         </p:nvSpPr>
         <p:spPr>
           <a:xfrm>
-            <a:off x="3757464" y="3842296"/>
+            <a:off x="3757464" y="3851821"/>
             <a:ext cx="8527018" cy="762000"/>
           </a:xfrm>
           <a:prstGeom prst="rect">
@@ -3789,7 +3793,7 @@
         </p:nvSpPr>
         <p:spPr>
           <a:xfrm>
-            <a:off x="914400" y="5013871"/>
+            <a:off x="914400" y="5004346"/>
             <a:ext cx="4353401" cy="123825"/>
           </a:xfrm>
           <a:prstGeom prst="rect">
@@ -3824,7 +3828,7 @@
         </p:nvSpPr>
         <p:spPr>
           <a:xfrm>
-            <a:off x="914400" y="5232946"/>
+            <a:off x="914400" y="5223421"/>
             <a:ext cx="4353401" cy="685800"/>
           </a:xfrm>
           <a:prstGeom prst="rect">
@@ -3863,7 +3867,7 @@
         </p:nvSpPr>
         <p:spPr>
           <a:xfrm>
-            <a:off x="914400" y="5994946"/>
+            <a:off x="914400" y="5985421"/>
             <a:ext cx="4353401" cy="133350"/>
           </a:xfrm>
           <a:prstGeom prst="rect">
@@ -3898,7 +3902,7 @@
         </p:nvSpPr>
         <p:spPr>
           <a:xfrm>
-            <a:off x="3901976" y="5013871"/>
+            <a:off x="3901976" y="5004346"/>
             <a:ext cx="4353639" cy="123825"/>
           </a:xfrm>
           <a:prstGeom prst="rect">
@@ -3933,7 +3937,7 @@
         </p:nvSpPr>
         <p:spPr>
           <a:xfrm>
-            <a:off x="3901976" y="5232946"/>
+            <a:off x="3901976" y="5223421"/>
             <a:ext cx="4353639" cy="685800"/>
           </a:xfrm>
           <a:prstGeom prst="rect">
@@ -3972,7 +3976,7 @@
         </p:nvSpPr>
         <p:spPr>
           <a:xfrm>
-            <a:off x="3901976" y="5994946"/>
+            <a:off x="3901976" y="5985421"/>
             <a:ext cx="4353639" cy="133350"/>
           </a:xfrm>
           <a:prstGeom prst="rect">
@@ -4007,7 +4011,7 @@
         </p:nvSpPr>
         <p:spPr>
           <a:xfrm>
-            <a:off x="6889700" y="5013871"/>
+            <a:off x="6889700" y="5004346"/>
             <a:ext cx="4353639" cy="123825"/>
           </a:xfrm>
           <a:prstGeom prst="rect">
@@ -4042,7 +4046,7 @@
         </p:nvSpPr>
         <p:spPr>
           <a:xfrm>
-            <a:off x="6889700" y="5232946"/>
+            <a:off x="6889700" y="5223421"/>
             <a:ext cx="4353639" cy="685800"/>
           </a:xfrm>
           <a:prstGeom prst="rect">
@@ -4081,7 +4085,7 @@
         </p:nvSpPr>
         <p:spPr>
           <a:xfrm>
-            <a:off x="6889700" y="5994946"/>
+            <a:off x="6889700" y="5985421"/>
             <a:ext cx="4353639" cy="133350"/>
           </a:xfrm>
           <a:prstGeom prst="rect">
@@ -4116,7 +4120,7 @@
         </p:nvSpPr>
         <p:spPr>
           <a:xfrm>
-            <a:off x="666750" y="6509296"/>
+            <a:off x="666750" y="6499771"/>
             <a:ext cx="8001000" cy="421184"/>
           </a:xfrm>
           <a:prstGeom prst="rect">
